--- a/assets/pptx/catalog-533.pptx
+++ b/assets/pptx/catalog-533.pptx
@@ -3268,7 +3268,7 @@
                 <a:ea typeface="Ebrima"/>
                 <a:cs typeface="Ebrima"/>
               </a:rPr>
-              <a:t>ተመሥገን ጌታ ክበር (2x)</a:t>
+              <a:t>ተመሥገን ጌታ ክበር 2x</a:t>
             </a:r>
           </a:p>
         </p:txBody>
@@ -3559,7 +3559,7 @@
                 <a:ea typeface="Ebrima"/>
                 <a:cs typeface="Ebrima"/>
               </a:rPr>
-              <a:t>አመልክሃለሁኝ ጌታዬ(2x)</a:t>
+              <a:t>አመልክሃለሁኝ ጌታዬ2x</a:t>
             </a:r>
           </a:p>
         </p:txBody>
@@ -3747,7 +3747,7 @@
                 <a:ea typeface="Ebrima"/>
                 <a:cs typeface="Ebrima"/>
               </a:rPr>
-              <a:t>አምልክሃለሁ እስከ ለዘለዓለም (4x)</a:t>
+              <a:t>አምልክሃለሁ እስከ ለዘለዓለም 4x</a:t>
             </a:r>
           </a:p>
         </p:txBody>
@@ -3868,7 +3868,7 @@
                 <a:ea typeface="Ebrima"/>
                 <a:cs typeface="Ebrima"/>
               </a:rPr>
-              <a:t>ላመስግንህ/ላሞጋግስህ ዛሬም እንደገና (2x)</a:t>
+              <a:t>ላመስግንህ/ላሞጋግስህ ዛሬም እንደገና 2x</a:t>
             </a:r>
           </a:p>
         </p:txBody>
@@ -3935,7 +3935,7 @@
                 <a:ea typeface="Ebrima"/>
                 <a:cs typeface="Ebrima"/>
               </a:rPr>
-              <a:t>አምልክሃለሁ እስከ ለዘለዓለም (4x)</a:t>
+              <a:t>አምልክሃለሁ እስከ ለዘለዓለም 4x</a:t>
             </a:r>
           </a:p>
         </p:txBody>
@@ -4056,7 +4056,7 @@
                 <a:ea typeface="Ebrima"/>
                 <a:cs typeface="Ebrima"/>
               </a:rPr>
-              <a:t>ተመሥገን ተመሥገን ተመሥገን እላለሁ (2x)</a:t>
+              <a:t>ተመሥገን ተመሥገን ተመሥገን እላለሁ 2x</a:t>
             </a:r>
           </a:p>
         </p:txBody>
@@ -4141,7 +4141,7 @@
                 <a:ea typeface="Ebrima"/>
                 <a:cs typeface="Ebrima"/>
               </a:rPr>
-              <a:t>አመልክሃለሁኝ ጌታዬ (2x)</a:t>
+              <a:t>አመልክሃለሁኝ ጌታዬ 2x</a:t>
             </a:r>
           </a:p>
         </p:txBody>
